--- a/slide/themes/src/26_prisma.pptx
+++ b/slide/themes/src/26_prisma.pptx
@@ -7099,9 +7099,6 @@
                     <a:lumMod val="75000"/>
                   </a:schemeClr>
                 </a:solidFill>
-                <a:latin typeface="Times New Roman"/>
-                <a:ea typeface="Times New Roman"/>
-                <a:cs typeface="Times New Roman"/>
               </a:defRPr>
             </a:lvl1pPr>
             <a:lvl2pPr>
@@ -7111,9 +7108,6 @@
                     <a:lumMod val="75000"/>
                   </a:schemeClr>
                 </a:solidFill>
-                <a:latin typeface="Times New Roman"/>
-                <a:ea typeface="Times New Roman"/>
-                <a:cs typeface="Times New Roman"/>
               </a:defRPr>
             </a:lvl2pPr>
             <a:lvl3pPr>
@@ -7123,9 +7117,6 @@
                     <a:lumMod val="75000"/>
                   </a:schemeClr>
                 </a:solidFill>
-                <a:latin typeface="Times New Roman"/>
-                <a:ea typeface="Times New Roman"/>
-                <a:cs typeface="Times New Roman"/>
               </a:defRPr>
             </a:lvl3pPr>
             <a:lvl4pPr>
@@ -7135,9 +7126,6 @@
                     <a:lumMod val="75000"/>
                   </a:schemeClr>
                 </a:solidFill>
-                <a:latin typeface="Times New Roman"/>
-                <a:ea typeface="Times New Roman"/>
-                <a:cs typeface="Times New Roman"/>
               </a:defRPr>
             </a:lvl4pPr>
             <a:lvl5pPr>
@@ -7147,9 +7135,6 @@
                     <a:lumMod val="75000"/>
                   </a:schemeClr>
                 </a:solidFill>
-                <a:latin typeface="Times New Roman"/>
-                <a:ea typeface="Times New Roman"/>
-                <a:cs typeface="Times New Roman"/>
               </a:defRPr>
             </a:lvl5pPr>
             <a:lvl6pPr>
@@ -7159,9 +7144,6 @@
                     <a:lumMod val="75000"/>
                   </a:schemeClr>
                 </a:solidFill>
-                <a:latin typeface="Times New Roman"/>
-                <a:ea typeface="Times New Roman"/>
-                <a:cs typeface="Times New Roman"/>
               </a:defRPr>
             </a:lvl6pPr>
             <a:lvl7pPr>
@@ -7171,9 +7153,6 @@
                     <a:lumMod val="75000"/>
                   </a:schemeClr>
                 </a:solidFill>
-                <a:latin typeface="Times New Roman"/>
-                <a:ea typeface="Times New Roman"/>
-                <a:cs typeface="Times New Roman"/>
               </a:defRPr>
             </a:lvl7pPr>
             <a:lvl8pPr>
@@ -7183,9 +7162,6 @@
                     <a:lumMod val="75000"/>
                   </a:schemeClr>
                 </a:solidFill>
-                <a:latin typeface="Times New Roman"/>
-                <a:ea typeface="Times New Roman"/>
-                <a:cs typeface="Times New Roman"/>
               </a:defRPr>
             </a:lvl8pPr>
             <a:lvl9pPr>
@@ -7195,9 +7171,6 @@
                     <a:lumMod val="75000"/>
                   </a:schemeClr>
                 </a:solidFill>
-                <a:latin typeface="Times New Roman"/>
-                <a:ea typeface="Times New Roman"/>
-                <a:cs typeface="Times New Roman"/>
               </a:defRPr>
             </a:lvl9pPr>
           </a:lstStyle>
@@ -7830,10 +7803,7 @@
             <a:pPr>
               <a:defRPr/>
             </a:pPr>
-            <a:endParaRPr>
-              <a:latin typeface="Times New Roman"/>
-              <a:cs typeface="Times New Roman"/>
-            </a:endParaRPr>
+            <a:endParaRPr/>
           </a:p>
         </p:txBody>
       </p:sp>
@@ -7923,13 +7893,13 @@
     </a:clrScheme>
     <a:fontScheme name="Office Theme">
       <a:majorFont>
-        <a:latin typeface="Arial"/>
+        <a:latin typeface="Times New Roman"/>
         <a:ea typeface="SimSun"/>
-        <a:cs typeface="Arial"/>
+        <a:cs typeface="Times New Roman"/>
       </a:majorFont>
       <a:minorFont>
         <a:latin typeface="Arial"/>
-        <a:ea typeface="SimSun"/>
+        <a:ea typeface="Microsoft YaHei"/>
         <a:cs typeface="Arial"/>
       </a:minorFont>
     </a:fontScheme>
@@ -8118,13 +8088,13 @@
     </a:clrScheme>
     <a:fontScheme name="Arial">
       <a:majorFont>
-        <a:latin typeface="Arial"/>
-        <a:ea typeface="Arial"/>
-        <a:cs typeface="Arial"/>
+        <a:latin typeface="Times New Roman"/>
+        <a:ea typeface="SimSun"/>
+        <a:cs typeface="Times New Roman"/>
       </a:majorFont>
       <a:minorFont>
         <a:latin typeface="Arial"/>
-        <a:ea typeface="Arial"/>
+        <a:ea typeface="Microsoft YaHei"/>
         <a:cs typeface="Arial"/>
       </a:minorFont>
     </a:fontScheme>

--- a/slide/themes/src/26_prisma.pptx
+++ b/slide/themes/src/26_prisma.pptx
@@ -536,10 +536,7 @@
             <a:pPr>
               <a:defRPr/>
             </a:pPr>
-            <a:endParaRPr lang="en-US">
-              <a:latin typeface="Arial"/>
-              <a:cs typeface="Arial"/>
-            </a:endParaRPr>
+            <a:endParaRPr lang="en-US"/>
           </a:p>
         </p:txBody>
       </p:sp>
